--- a/github_copilot_chat_for_etl.pptx
+++ b/github_copilot_chat_for_etl.pptx
@@ -5,28 +5,28 @@
     <p:sldMasterId id="2147483648" r:id="rId1"/>
   </p:sldMasterIdLst>
   <p:sldIdLst>
-    <p:sldId id="256" r:id="rId7"/>
-    <p:sldId id="257" r:id="rId8"/>
-    <p:sldId id="258" r:id="rId9"/>
-    <p:sldId id="259" r:id="rId10"/>
-    <p:sldId id="260" r:id="rId11"/>
-    <p:sldId id="261" r:id="rId12"/>
-    <p:sldId id="262" r:id="rId13"/>
-    <p:sldId id="263" r:id="rId14"/>
-    <p:sldId id="264" r:id="rId15"/>
-    <p:sldId id="265" r:id="rId16"/>
-    <p:sldId id="266" r:id="rId17"/>
-    <p:sldId id="267" r:id="rId18"/>
-    <p:sldId id="268" r:id="rId19"/>
-    <p:sldId id="269" r:id="rId20"/>
-    <p:sldId id="270" r:id="rId21"/>
-    <p:sldId id="271" r:id="rId22"/>
-    <p:sldId id="272" r:id="rId23"/>
-    <p:sldId id="273" r:id="rId24"/>
-    <p:sldId id="274" r:id="rId25"/>
-    <p:sldId id="275" r:id="rId26"/>
-    <p:sldId id="276" r:id="rId27"/>
-    <p:sldId id="277" r:id="rId28"/>
+    <p:sldId id="256" r:id="rId2"/>
+    <p:sldId id="257" r:id="rId3"/>
+    <p:sldId id="258" r:id="rId4"/>
+    <p:sldId id="259" r:id="rId5"/>
+    <p:sldId id="260" r:id="rId6"/>
+    <p:sldId id="261" r:id="rId7"/>
+    <p:sldId id="262" r:id="rId8"/>
+    <p:sldId id="263" r:id="rId9"/>
+    <p:sldId id="264" r:id="rId10"/>
+    <p:sldId id="265" r:id="rId11"/>
+    <p:sldId id="266" r:id="rId12"/>
+    <p:sldId id="267" r:id="rId13"/>
+    <p:sldId id="268" r:id="rId14"/>
+    <p:sldId id="269" r:id="rId15"/>
+    <p:sldId id="270" r:id="rId16"/>
+    <p:sldId id="271" r:id="rId17"/>
+    <p:sldId id="272" r:id="rId18"/>
+    <p:sldId id="273" r:id="rId19"/>
+    <p:sldId id="274" r:id="rId20"/>
+    <p:sldId id="275" r:id="rId21"/>
+    <p:sldId id="276" r:id="rId22"/>
+    <p:sldId id="277" r:id="rId23"/>
   </p:sldIdLst>
   <p:sldSz cx="9144000" cy="6858000" type="screen4x3"/>
   <p:notesSz cx="6858000" cy="9144000"/>
@@ -125,6 +125,22 @@
       </a:defRPr>
     </a:lvl9pPr>
   </p:defaultTextStyle>
+  <p:extLst>
+    <p:ext uri="{EFAFB233-063F-42B5-8137-9DF3F51BA10A}">
+      <p15:sldGuideLst xmlns:p15="http://schemas.microsoft.com/office/powerpoint/2012/main">
+        <p15:guide id="1" orient="horz" pos="2160">
+          <p15:clr>
+            <a:srgbClr val="A4A3A4"/>
+          </p15:clr>
+        </p15:guide>
+        <p15:guide id="2" pos="2880">
+          <p15:clr>
+            <a:srgbClr val="A4A3A4"/>
+          </p15:clr>
+        </p15:guide>
+      </p15:sldGuideLst>
+    </p:ext>
+  </p:extLst>
 </p:presentation>
 </file>
 
@@ -166,10 +182,9 @@
           <a:lstStyle/>
           <a:p>
             <a:r>
-              <a:rPr lang="en-US" smtClean="0"/>
+              <a:rPr lang="en-US"/>
               <a:t>Click to edit Master title style</a:t>
             </a:r>
-            <a:endParaRPr lang="en-US"/>
           </a:p>
         </p:txBody>
       </p:sp>
@@ -285,10 +300,9 @@
           </a:lstStyle>
           <a:p>
             <a:r>
-              <a:rPr lang="en-US" smtClean="0"/>
+              <a:rPr lang="en-US"/>
               <a:t>Click to edit Master subtitle style</a:t>
             </a:r>
-            <a:endParaRPr lang="en-US"/>
           </a:p>
         </p:txBody>
       </p:sp>
@@ -309,7 +323,7 @@
           <a:p>
             <a:fld id="{5BCAD085-E8A6-8845-BD4E-CB4CCA059FC4}" type="datetimeFigureOut">
               <a:rPr lang="en-US" smtClean="0"/>
-              <a:t>1/27/13</a:t>
+              <a:t>3/20/2026</a:t>
             </a:fld>
             <a:endParaRPr lang="en-US"/>
           </a:p>
@@ -403,10 +417,9 @@
           <a:lstStyle/>
           <a:p>
             <a:r>
-              <a:rPr lang="en-US" smtClean="0"/>
+              <a:rPr lang="en-US"/>
               <a:t>Click to edit Master title style</a:t>
             </a:r>
-            <a:endParaRPr lang="en-US"/>
           </a:p>
         </p:txBody>
       </p:sp>
@@ -427,38 +440,37 @@
           <a:p>
             <a:pPr lvl="0"/>
             <a:r>
-              <a:rPr lang="en-US" smtClean="0"/>
+              <a:rPr lang="en-US"/>
               <a:t>Click to edit Master text styles</a:t>
             </a:r>
           </a:p>
           <a:p>
             <a:pPr lvl="1"/>
             <a:r>
-              <a:rPr lang="en-US" smtClean="0"/>
+              <a:rPr lang="en-US"/>
               <a:t>Second level</a:t>
             </a:r>
           </a:p>
           <a:p>
             <a:pPr lvl="2"/>
             <a:r>
-              <a:rPr lang="en-US" smtClean="0"/>
+              <a:rPr lang="en-US"/>
               <a:t>Third level</a:t>
             </a:r>
           </a:p>
           <a:p>
             <a:pPr lvl="3"/>
             <a:r>
-              <a:rPr lang="en-US" smtClean="0"/>
+              <a:rPr lang="en-US"/>
               <a:t>Fourth level</a:t>
             </a:r>
           </a:p>
           <a:p>
             <a:pPr lvl="4"/>
             <a:r>
-              <a:rPr lang="en-US" smtClean="0"/>
+              <a:rPr lang="en-US"/>
               <a:t>Fifth level</a:t>
             </a:r>
-            <a:endParaRPr lang="en-US"/>
           </a:p>
         </p:txBody>
       </p:sp>
@@ -479,7 +491,7 @@
           <a:p>
             <a:fld id="{5BCAD085-E8A6-8845-BD4E-CB4CCA059FC4}" type="datetimeFigureOut">
               <a:rPr lang="en-US" smtClean="0"/>
-              <a:t>1/27/13</a:t>
+              <a:t>3/20/2026</a:t>
             </a:fld>
             <a:endParaRPr lang="en-US"/>
           </a:p>
@@ -578,10 +590,9 @@
           <a:lstStyle/>
           <a:p>
             <a:r>
-              <a:rPr lang="en-US" smtClean="0"/>
+              <a:rPr lang="en-US"/>
               <a:t>Click to edit Master title style</a:t>
             </a:r>
-            <a:endParaRPr lang="en-US"/>
           </a:p>
         </p:txBody>
       </p:sp>
@@ -607,38 +618,37 @@
           <a:p>
             <a:pPr lvl="0"/>
             <a:r>
-              <a:rPr lang="en-US" smtClean="0"/>
+              <a:rPr lang="en-US"/>
               <a:t>Click to edit Master text styles</a:t>
             </a:r>
           </a:p>
           <a:p>
             <a:pPr lvl="1"/>
             <a:r>
-              <a:rPr lang="en-US" smtClean="0"/>
+              <a:rPr lang="en-US"/>
               <a:t>Second level</a:t>
             </a:r>
           </a:p>
           <a:p>
             <a:pPr lvl="2"/>
             <a:r>
-              <a:rPr lang="en-US" smtClean="0"/>
+              <a:rPr lang="en-US"/>
               <a:t>Third level</a:t>
             </a:r>
           </a:p>
           <a:p>
             <a:pPr lvl="3"/>
             <a:r>
-              <a:rPr lang="en-US" smtClean="0"/>
+              <a:rPr lang="en-US"/>
               <a:t>Fourth level</a:t>
             </a:r>
           </a:p>
           <a:p>
             <a:pPr lvl="4"/>
             <a:r>
-              <a:rPr lang="en-US" smtClean="0"/>
+              <a:rPr lang="en-US"/>
               <a:t>Fifth level</a:t>
             </a:r>
-            <a:endParaRPr lang="en-US"/>
           </a:p>
         </p:txBody>
       </p:sp>
@@ -659,7 +669,7 @@
           <a:p>
             <a:fld id="{5BCAD085-E8A6-8845-BD4E-CB4CCA059FC4}" type="datetimeFigureOut">
               <a:rPr lang="en-US" smtClean="0"/>
-              <a:t>1/27/13</a:t>
+              <a:t>3/20/2026</a:t>
             </a:fld>
             <a:endParaRPr lang="en-US"/>
           </a:p>
@@ -753,10 +763,9 @@
           <a:lstStyle/>
           <a:p>
             <a:r>
-              <a:rPr lang="en-US" smtClean="0"/>
+              <a:rPr lang="en-US"/>
               <a:t>Click to edit Master title style</a:t>
             </a:r>
-            <a:endParaRPr lang="en-US"/>
           </a:p>
         </p:txBody>
       </p:sp>
@@ -777,38 +786,37 @@
           <a:p>
             <a:pPr lvl="0"/>
             <a:r>
-              <a:rPr lang="en-US" smtClean="0"/>
+              <a:rPr lang="en-US"/>
               <a:t>Click to edit Master text styles</a:t>
             </a:r>
           </a:p>
           <a:p>
             <a:pPr lvl="1"/>
             <a:r>
-              <a:rPr lang="en-US" smtClean="0"/>
+              <a:rPr lang="en-US"/>
               <a:t>Second level</a:t>
             </a:r>
           </a:p>
           <a:p>
             <a:pPr lvl="2"/>
             <a:r>
-              <a:rPr lang="en-US" smtClean="0"/>
+              <a:rPr lang="en-US"/>
               <a:t>Third level</a:t>
             </a:r>
           </a:p>
           <a:p>
             <a:pPr lvl="3"/>
             <a:r>
-              <a:rPr lang="en-US" smtClean="0"/>
+              <a:rPr lang="en-US"/>
               <a:t>Fourth level</a:t>
             </a:r>
           </a:p>
           <a:p>
             <a:pPr lvl="4"/>
             <a:r>
-              <a:rPr lang="en-US" smtClean="0"/>
+              <a:rPr lang="en-US"/>
               <a:t>Fifth level</a:t>
             </a:r>
-            <a:endParaRPr lang="en-US"/>
           </a:p>
         </p:txBody>
       </p:sp>
@@ -829,7 +837,7 @@
           <a:p>
             <a:fld id="{5BCAD085-E8A6-8845-BD4E-CB4CCA059FC4}" type="datetimeFigureOut">
               <a:rPr lang="en-US" smtClean="0"/>
-              <a:t>1/27/13</a:t>
+              <a:t>3/20/2026</a:t>
             </a:fld>
             <a:endParaRPr lang="en-US"/>
           </a:p>
@@ -932,10 +940,9 @@
           </a:lstStyle>
           <a:p>
             <a:r>
-              <a:rPr lang="en-US" smtClean="0"/>
+              <a:rPr lang="en-US"/>
               <a:t>Click to edit Master title style</a:t>
             </a:r>
-            <a:endParaRPr lang="en-US"/>
           </a:p>
         </p:txBody>
       </p:sp>
@@ -1052,7 +1059,7 @@
           <a:p>
             <a:pPr lvl="0"/>
             <a:r>
-              <a:rPr lang="en-US" smtClean="0"/>
+              <a:rPr lang="en-US"/>
               <a:t>Click to edit Master text styles</a:t>
             </a:r>
           </a:p>
@@ -1075,7 +1082,7 @@
           <a:p>
             <a:fld id="{5BCAD085-E8A6-8845-BD4E-CB4CCA059FC4}" type="datetimeFigureOut">
               <a:rPr lang="en-US" smtClean="0"/>
-              <a:t>1/27/13</a:t>
+              <a:t>3/20/2026</a:t>
             </a:fld>
             <a:endParaRPr lang="en-US"/>
           </a:p>
@@ -1169,10 +1176,9 @@
           <a:lstStyle/>
           <a:p>
             <a:r>
-              <a:rPr lang="en-US" smtClean="0"/>
+              <a:rPr lang="en-US"/>
               <a:t>Click to edit Master title style</a:t>
             </a:r>
-            <a:endParaRPr lang="en-US"/>
           </a:p>
         </p:txBody>
       </p:sp>
@@ -1226,38 +1232,37 @@
           <a:p>
             <a:pPr lvl="0"/>
             <a:r>
-              <a:rPr lang="en-US" smtClean="0"/>
+              <a:rPr lang="en-US"/>
               <a:t>Click to edit Master text styles</a:t>
             </a:r>
           </a:p>
           <a:p>
             <a:pPr lvl="1"/>
             <a:r>
-              <a:rPr lang="en-US" smtClean="0"/>
+              <a:rPr lang="en-US"/>
               <a:t>Second level</a:t>
             </a:r>
           </a:p>
           <a:p>
             <a:pPr lvl="2"/>
             <a:r>
-              <a:rPr lang="en-US" smtClean="0"/>
+              <a:rPr lang="en-US"/>
               <a:t>Third level</a:t>
             </a:r>
           </a:p>
           <a:p>
             <a:pPr lvl="3"/>
             <a:r>
-              <a:rPr lang="en-US" smtClean="0"/>
+              <a:rPr lang="en-US"/>
               <a:t>Fourth level</a:t>
             </a:r>
           </a:p>
           <a:p>
             <a:pPr lvl="4"/>
             <a:r>
-              <a:rPr lang="en-US" smtClean="0"/>
+              <a:rPr lang="en-US"/>
               <a:t>Fifth level</a:t>
             </a:r>
-            <a:endParaRPr lang="en-US"/>
           </a:p>
         </p:txBody>
       </p:sp>
@@ -1311,38 +1316,37 @@
           <a:p>
             <a:pPr lvl="0"/>
             <a:r>
-              <a:rPr lang="en-US" smtClean="0"/>
+              <a:rPr lang="en-US"/>
               <a:t>Click to edit Master text styles</a:t>
             </a:r>
           </a:p>
           <a:p>
             <a:pPr lvl="1"/>
             <a:r>
-              <a:rPr lang="en-US" smtClean="0"/>
+              <a:rPr lang="en-US"/>
               <a:t>Second level</a:t>
             </a:r>
           </a:p>
           <a:p>
             <a:pPr lvl="2"/>
             <a:r>
-              <a:rPr lang="en-US" smtClean="0"/>
+              <a:rPr lang="en-US"/>
               <a:t>Third level</a:t>
             </a:r>
           </a:p>
           <a:p>
             <a:pPr lvl="3"/>
             <a:r>
-              <a:rPr lang="en-US" smtClean="0"/>
+              <a:rPr lang="en-US"/>
               <a:t>Fourth level</a:t>
             </a:r>
           </a:p>
           <a:p>
             <a:pPr lvl="4"/>
             <a:r>
-              <a:rPr lang="en-US" smtClean="0"/>
+              <a:rPr lang="en-US"/>
               <a:t>Fifth level</a:t>
             </a:r>
-            <a:endParaRPr lang="en-US"/>
           </a:p>
         </p:txBody>
       </p:sp>
@@ -1363,7 +1367,7 @@
           <a:p>
             <a:fld id="{5BCAD085-E8A6-8845-BD4E-CB4CCA059FC4}" type="datetimeFigureOut">
               <a:rPr lang="en-US" smtClean="0"/>
-              <a:t>1/27/13</a:t>
+              <a:t>3/20/2026</a:t>
             </a:fld>
             <a:endParaRPr lang="en-US"/>
           </a:p>
@@ -1461,10 +1465,9 @@
           </a:lstStyle>
           <a:p>
             <a:r>
-              <a:rPr lang="en-US" smtClean="0"/>
+              <a:rPr lang="en-US"/>
               <a:t>Click to edit Master title style</a:t>
             </a:r>
-            <a:endParaRPr lang="en-US"/>
           </a:p>
         </p:txBody>
       </p:sp>
@@ -1527,7 +1530,7 @@
           <a:p>
             <a:pPr lvl="0"/>
             <a:r>
-              <a:rPr lang="en-US" smtClean="0"/>
+              <a:rPr lang="en-US"/>
               <a:t>Click to edit Master text styles</a:t>
             </a:r>
           </a:p>
@@ -1583,38 +1586,37 @@
           <a:p>
             <a:pPr lvl="0"/>
             <a:r>
-              <a:rPr lang="en-US" smtClean="0"/>
+              <a:rPr lang="en-US"/>
               <a:t>Click to edit Master text styles</a:t>
             </a:r>
           </a:p>
           <a:p>
             <a:pPr lvl="1"/>
             <a:r>
-              <a:rPr lang="en-US" smtClean="0"/>
+              <a:rPr lang="en-US"/>
               <a:t>Second level</a:t>
             </a:r>
           </a:p>
           <a:p>
             <a:pPr lvl="2"/>
             <a:r>
-              <a:rPr lang="en-US" smtClean="0"/>
+              <a:rPr lang="en-US"/>
               <a:t>Third level</a:t>
             </a:r>
           </a:p>
           <a:p>
             <a:pPr lvl="3"/>
             <a:r>
-              <a:rPr lang="en-US" smtClean="0"/>
+              <a:rPr lang="en-US"/>
               <a:t>Fourth level</a:t>
             </a:r>
           </a:p>
           <a:p>
             <a:pPr lvl="4"/>
             <a:r>
-              <a:rPr lang="en-US" smtClean="0"/>
+              <a:rPr lang="en-US"/>
               <a:t>Fifth level</a:t>
             </a:r>
-            <a:endParaRPr lang="en-US"/>
           </a:p>
         </p:txBody>
       </p:sp>
@@ -1677,7 +1679,7 @@
           <a:p>
             <a:pPr lvl="0"/>
             <a:r>
-              <a:rPr lang="en-US" smtClean="0"/>
+              <a:rPr lang="en-US"/>
               <a:t>Click to edit Master text styles</a:t>
             </a:r>
           </a:p>
@@ -1733,38 +1735,37 @@
           <a:p>
             <a:pPr lvl="0"/>
             <a:r>
-              <a:rPr lang="en-US" smtClean="0"/>
+              <a:rPr lang="en-US"/>
               <a:t>Click to edit Master text styles</a:t>
             </a:r>
           </a:p>
           <a:p>
             <a:pPr lvl="1"/>
             <a:r>
-              <a:rPr lang="en-US" smtClean="0"/>
+              <a:rPr lang="en-US"/>
               <a:t>Second level</a:t>
             </a:r>
           </a:p>
           <a:p>
             <a:pPr lvl="2"/>
             <a:r>
-              <a:rPr lang="en-US" smtClean="0"/>
+              <a:rPr lang="en-US"/>
               <a:t>Third level</a:t>
             </a:r>
           </a:p>
           <a:p>
             <a:pPr lvl="3"/>
             <a:r>
-              <a:rPr lang="en-US" smtClean="0"/>
+              <a:rPr lang="en-US"/>
               <a:t>Fourth level</a:t>
             </a:r>
           </a:p>
           <a:p>
             <a:pPr lvl="4"/>
             <a:r>
-              <a:rPr lang="en-US" smtClean="0"/>
+              <a:rPr lang="en-US"/>
               <a:t>Fifth level</a:t>
             </a:r>
-            <a:endParaRPr lang="en-US"/>
           </a:p>
         </p:txBody>
       </p:sp>
@@ -1785,7 +1786,7 @@
           <a:p>
             <a:fld id="{5BCAD085-E8A6-8845-BD4E-CB4CCA059FC4}" type="datetimeFigureOut">
               <a:rPr lang="en-US" smtClean="0"/>
-              <a:t>1/27/13</a:t>
+              <a:t>3/20/2026</a:t>
             </a:fld>
             <a:endParaRPr lang="en-US"/>
           </a:p>
@@ -1879,10 +1880,9 @@
           <a:lstStyle/>
           <a:p>
             <a:r>
-              <a:rPr lang="en-US" smtClean="0"/>
+              <a:rPr lang="en-US"/>
               <a:t>Click to edit Master title style</a:t>
             </a:r>
-            <a:endParaRPr lang="en-US"/>
           </a:p>
         </p:txBody>
       </p:sp>
@@ -1903,7 +1903,7 @@
           <a:p>
             <a:fld id="{5BCAD085-E8A6-8845-BD4E-CB4CCA059FC4}" type="datetimeFigureOut">
               <a:rPr lang="en-US" smtClean="0"/>
-              <a:t>1/27/13</a:t>
+              <a:t>3/20/2026</a:t>
             </a:fld>
             <a:endParaRPr lang="en-US"/>
           </a:p>
@@ -1998,7 +1998,7 @@
           <a:p>
             <a:fld id="{5BCAD085-E8A6-8845-BD4E-CB4CCA059FC4}" type="datetimeFigureOut">
               <a:rPr lang="en-US" smtClean="0"/>
-              <a:t>1/27/13</a:t>
+              <a:t>3/20/2026</a:t>
             </a:fld>
             <a:endParaRPr lang="en-US"/>
           </a:p>
@@ -2101,10 +2101,9 @@
           </a:lstStyle>
           <a:p>
             <a:r>
-              <a:rPr lang="en-US" smtClean="0"/>
+              <a:rPr lang="en-US"/>
               <a:t>Click to edit Master title style</a:t>
             </a:r>
-            <a:endParaRPr lang="en-US"/>
           </a:p>
         </p:txBody>
       </p:sp>
@@ -2158,38 +2157,37 @@
           <a:p>
             <a:pPr lvl="0"/>
             <a:r>
-              <a:rPr lang="en-US" smtClean="0"/>
+              <a:rPr lang="en-US"/>
               <a:t>Click to edit Master text styles</a:t>
             </a:r>
           </a:p>
           <a:p>
             <a:pPr lvl="1"/>
             <a:r>
-              <a:rPr lang="en-US" smtClean="0"/>
+              <a:rPr lang="en-US"/>
               <a:t>Second level</a:t>
             </a:r>
           </a:p>
           <a:p>
             <a:pPr lvl="2"/>
             <a:r>
-              <a:rPr lang="en-US" smtClean="0"/>
+              <a:rPr lang="en-US"/>
               <a:t>Third level</a:t>
             </a:r>
           </a:p>
           <a:p>
             <a:pPr lvl="3"/>
             <a:r>
-              <a:rPr lang="en-US" smtClean="0"/>
+              <a:rPr lang="en-US"/>
               <a:t>Fourth level</a:t>
             </a:r>
           </a:p>
           <a:p>
             <a:pPr lvl="4"/>
             <a:r>
-              <a:rPr lang="en-US" smtClean="0"/>
+              <a:rPr lang="en-US"/>
               <a:t>Fifth level</a:t>
             </a:r>
-            <a:endParaRPr lang="en-US"/>
           </a:p>
         </p:txBody>
       </p:sp>
@@ -2252,7 +2250,7 @@
           <a:p>
             <a:pPr lvl="0"/>
             <a:r>
-              <a:rPr lang="en-US" smtClean="0"/>
+              <a:rPr lang="en-US"/>
               <a:t>Click to edit Master text styles</a:t>
             </a:r>
           </a:p>
@@ -2275,7 +2273,7 @@
           <a:p>
             <a:fld id="{5BCAD085-E8A6-8845-BD4E-CB4CCA059FC4}" type="datetimeFigureOut">
               <a:rPr lang="en-US" smtClean="0"/>
-              <a:t>1/27/13</a:t>
+              <a:t>3/20/2026</a:t>
             </a:fld>
             <a:endParaRPr lang="en-US"/>
           </a:p>
@@ -2378,10 +2376,9 @@
           </a:lstStyle>
           <a:p>
             <a:r>
-              <a:rPr lang="en-US" smtClean="0"/>
+              <a:rPr lang="en-US"/>
               <a:t>Click to edit Master title style</a:t>
             </a:r>
-            <a:endParaRPr lang="en-US"/>
           </a:p>
         </p:txBody>
       </p:sp>
@@ -2505,7 +2502,7 @@
           <a:p>
             <a:pPr lvl="0"/>
             <a:r>
-              <a:rPr lang="en-US" smtClean="0"/>
+              <a:rPr lang="en-US"/>
               <a:t>Click to edit Master text styles</a:t>
             </a:r>
           </a:p>
@@ -2528,7 +2525,7 @@
           <a:p>
             <a:fld id="{5BCAD085-E8A6-8845-BD4E-CB4CCA059FC4}" type="datetimeFigureOut">
               <a:rPr lang="en-US" smtClean="0"/>
-              <a:t>1/27/13</a:t>
+              <a:t>3/20/2026</a:t>
             </a:fld>
             <a:endParaRPr lang="en-US"/>
           </a:p>
@@ -2637,10 +2634,9 @@
           <a:lstStyle/>
           <a:p>
             <a:r>
-              <a:rPr lang="en-US" smtClean="0"/>
+              <a:rPr lang="en-US"/>
               <a:t>Click to edit Master title style</a:t>
             </a:r>
-            <a:endParaRPr lang="en-US"/>
           </a:p>
         </p:txBody>
       </p:sp>
@@ -2671,38 +2667,37 @@
           <a:p>
             <a:pPr lvl="0"/>
             <a:r>
-              <a:rPr lang="en-US" smtClean="0"/>
+              <a:rPr lang="en-US"/>
               <a:t>Click to edit Master text styles</a:t>
             </a:r>
           </a:p>
           <a:p>
             <a:pPr lvl="1"/>
             <a:r>
-              <a:rPr lang="en-US" smtClean="0"/>
+              <a:rPr lang="en-US"/>
               <a:t>Second level</a:t>
             </a:r>
           </a:p>
           <a:p>
             <a:pPr lvl="2"/>
             <a:r>
-              <a:rPr lang="en-US" smtClean="0"/>
+              <a:rPr lang="en-US"/>
               <a:t>Third level</a:t>
             </a:r>
           </a:p>
           <a:p>
             <a:pPr lvl="3"/>
             <a:r>
-              <a:rPr lang="en-US" smtClean="0"/>
+              <a:rPr lang="en-US"/>
               <a:t>Fourth level</a:t>
             </a:r>
           </a:p>
           <a:p>
             <a:pPr lvl="4"/>
             <a:r>
-              <a:rPr lang="en-US" smtClean="0"/>
+              <a:rPr lang="en-US"/>
               <a:t>Fifth level</a:t>
             </a:r>
-            <a:endParaRPr lang="en-US"/>
           </a:p>
         </p:txBody>
       </p:sp>
@@ -2741,7 +2736,7 @@
           <a:p>
             <a:fld id="{5BCAD085-E8A6-8845-BD4E-CB4CCA059FC4}" type="datetimeFigureOut">
               <a:rPr lang="en-US" smtClean="0"/>
-              <a:t>1/27/13</a:t>
+              <a:t>3/20/2026</a:t>
             </a:fld>
             <a:endParaRPr lang="en-US"/>
           </a:p>
@@ -3100,7 +3095,7 @@
 </file>
 
 <file path=ppt/slides/slide1.xml><?xml version="1.0" encoding="utf-8"?>
-<p:sld xmlns:a="http://schemas.openxmlformats.org/drawingml/2006/main" xmlns:p="http://schemas.openxmlformats.org/presentationml/2006/main" xmlns:r="http://schemas.openxmlformats.org/officeDocument/2006/relationships">
+<p:sld xmlns:a="http://schemas.openxmlformats.org/drawingml/2006/main" xmlns:r="http://schemas.openxmlformats.org/officeDocument/2006/relationships" xmlns:p="http://schemas.openxmlformats.org/presentationml/2006/main">
   <p:cSld>
     <p:spTree>
       <p:nvGrpSpPr>
@@ -3108,7 +3103,14 @@
         <p:cNvGrpSpPr/>
         <p:nvPr/>
       </p:nvGrpSpPr>
-      <p:grpSpPr/>
+      <p:grpSpPr>
+        <a:xfrm>
+          <a:off x="0" y="0"/>
+          <a:ext cx="0" cy="0"/>
+          <a:chOff x="0" y="0"/>
+          <a:chExt cx="0" cy="0"/>
+        </a:xfrm>
+      </p:grpSpPr>
       <p:sp>
         <p:nvSpPr>
           <p:cNvPr id="2" name="Title 1"/>
@@ -3150,13 +3152,11 @@
             </a:r>
           </a:p>
           <a:p>
-            <a:pPr/>
             <a:r>
               <a:t>Focus today: Ask, Edit, Agent modes + simple prompt tricks</a:t>
             </a:r>
           </a:p>
           <a:p>
-            <a:pPr/>
             <a:r>
               <a:t>No Python needed – we will work with SQL examples</a:t>
             </a:r>
@@ -3172,7 +3172,7 @@
 </file>
 
 <file path=ppt/slides/slide10.xml><?xml version="1.0" encoding="utf-8"?>
-<p:sld xmlns:a="http://schemas.openxmlformats.org/drawingml/2006/main" xmlns:p="http://schemas.openxmlformats.org/presentationml/2006/main" xmlns:r="http://schemas.openxmlformats.org/officeDocument/2006/relationships">
+<p:sld xmlns:a="http://schemas.openxmlformats.org/drawingml/2006/main" xmlns:r="http://schemas.openxmlformats.org/officeDocument/2006/relationships" xmlns:p="http://schemas.openxmlformats.org/presentationml/2006/main">
   <p:cSld>
     <p:spTree>
       <p:nvGrpSpPr>
@@ -3180,7 +3180,14 @@
         <p:cNvGrpSpPr/>
         <p:nvPr/>
       </p:nvGrpSpPr>
-      <p:grpSpPr/>
+      <p:grpSpPr>
+        <a:xfrm>
+          <a:off x="0" y="0"/>
+          <a:ext cx="0" cy="0"/>
+          <a:chOff x="0" y="0"/>
+          <a:chExt cx="0" cy="0"/>
+        </a:xfrm>
+      </p:grpSpPr>
       <p:sp>
         <p:nvSpPr>
           <p:cNvPr id="2" name="Title 1"/>
@@ -3222,19 +3229,16 @@
             </a:r>
           </a:p>
           <a:p>
-            <a:pPr/>
             <a:r>
               <a:t>Use /explain on a complex query or stored procedure</a:t>
             </a:r>
           </a:p>
           <a:p>
-            <a:pPr/>
             <a:r>
               <a:t>Use /fix with an error message or failing script</a:t>
             </a:r>
           </a:p>
           <a:p>
-            <a:pPr/>
             <a:r>
               <a:t>Use /optimize on a slow query with joins and aggregates</a:t>
             </a:r>
@@ -3250,7 +3254,7 @@
 </file>
 
 <file path=ppt/slides/slide11.xml><?xml version="1.0" encoding="utf-8"?>
-<p:sld xmlns:a="http://schemas.openxmlformats.org/drawingml/2006/main" xmlns:p="http://schemas.openxmlformats.org/presentationml/2006/main" xmlns:r="http://schemas.openxmlformats.org/officeDocument/2006/relationships">
+<p:sld xmlns:a="http://schemas.openxmlformats.org/drawingml/2006/main" xmlns:r="http://schemas.openxmlformats.org/officeDocument/2006/relationships" xmlns:p="http://schemas.openxmlformats.org/presentationml/2006/main">
   <p:cSld>
     <p:spTree>
       <p:nvGrpSpPr>
@@ -3258,7 +3262,14 @@
         <p:cNvGrpSpPr/>
         <p:nvPr/>
       </p:nvGrpSpPr>
-      <p:grpSpPr/>
+      <p:grpSpPr>
+        <a:xfrm>
+          <a:off x="0" y="0"/>
+          <a:ext cx="0" cy="0"/>
+          <a:chOff x="0" y="0"/>
+          <a:chExt cx="0" cy="0"/>
+        </a:xfrm>
+      </p:grpSpPr>
       <p:sp>
         <p:nvSpPr>
           <p:cNvPr id="2" name="Title 1"/>
@@ -3300,19 +3311,16 @@
             </a:r>
           </a:p>
           <a:p>
-            <a:pPr/>
             <a:r>
               <a:t>Example: 'Write a query on sales(order_id, amount, order_date, region) to show total amount per region for last 7 days'</a:t>
             </a:r>
           </a:p>
           <a:p>
-            <a:pPr/>
             <a:r>
               <a:t>Be specific about columns, filters, and sorting</a:t>
             </a:r>
           </a:p>
           <a:p>
-            <a:pPr/>
             <a:r>
               <a:t>Ask follow‑up: 'Now add a filter for India region only'</a:t>
             </a:r>
@@ -3328,7 +3336,7 @@
 </file>
 
 <file path=ppt/slides/slide12.xml><?xml version="1.0" encoding="utf-8"?>
-<p:sld xmlns:a="http://schemas.openxmlformats.org/drawingml/2006/main" xmlns:p="http://schemas.openxmlformats.org/presentationml/2006/main" xmlns:r="http://schemas.openxmlformats.org/officeDocument/2006/relationships">
+<p:sld xmlns:a="http://schemas.openxmlformats.org/drawingml/2006/main" xmlns:r="http://schemas.openxmlformats.org/officeDocument/2006/relationships" xmlns:p="http://schemas.openxmlformats.org/presentationml/2006/main">
   <p:cSld>
     <p:spTree>
       <p:nvGrpSpPr>
@@ -3336,7 +3344,14 @@
         <p:cNvGrpSpPr/>
         <p:nvPr/>
       </p:nvGrpSpPr>
-      <p:grpSpPr/>
+      <p:grpSpPr>
+        <a:xfrm>
+          <a:off x="0" y="0"/>
+          <a:ext cx="0" cy="0"/>
+          <a:chOff x="0" y="0"/>
+          <a:chExt cx="0" cy="0"/>
+        </a:xfrm>
+      </p:grpSpPr>
       <p:sp>
         <p:nvSpPr>
           <p:cNvPr id="2" name="Title 1"/>
@@ -3378,19 +3393,16 @@
             </a:r>
           </a:p>
           <a:p>
-            <a:pPr/>
             <a:r>
               <a:t>Use on existing SQL from production or staging layer</a:t>
             </a:r>
           </a:p>
           <a:p>
-            <a:pPr/>
             <a:r>
               <a:t>Good for learning and cleaning old scripts</a:t>
             </a:r>
           </a:p>
           <a:p>
-            <a:pPr/>
             <a:r>
               <a:t>Ask follow‑up: 'Add comments so a new joiner can understand'</a:t>
             </a:r>
@@ -3406,7 +3418,7 @@
 </file>
 
 <file path=ppt/slides/slide13.xml><?xml version="1.0" encoding="utf-8"?>
-<p:sld xmlns:a="http://schemas.openxmlformats.org/drawingml/2006/main" xmlns:p="http://schemas.openxmlformats.org/presentationml/2006/main" xmlns:r="http://schemas.openxmlformats.org/officeDocument/2006/relationships">
+<p:sld xmlns:a="http://schemas.openxmlformats.org/drawingml/2006/main" xmlns:r="http://schemas.openxmlformats.org/officeDocument/2006/relationships" xmlns:p="http://schemas.openxmlformats.org/presentationml/2006/main">
   <p:cSld>
     <p:spTree>
       <p:nvGrpSpPr>
@@ -3414,7 +3426,14 @@
         <p:cNvGrpSpPr/>
         <p:nvPr/>
       </p:nvGrpSpPr>
-      <p:grpSpPr/>
+      <p:grpSpPr>
+        <a:xfrm>
+          <a:off x="0" y="0"/>
+          <a:ext cx="0" cy="0"/>
+          <a:chOff x="0" y="0"/>
+          <a:chExt cx="0" cy="0"/>
+        </a:xfrm>
+      </p:grpSpPr>
       <p:sp>
         <p:nvSpPr>
           <p:cNvPr id="2" name="Title 1"/>
@@ -3456,19 +3475,16 @@
             </a:r>
           </a:p>
           <a:p>
-            <a:pPr/>
             <a:r>
               <a:t>Example: 'Review this query and tell me what questions I should ask the business user'</a:t>
             </a:r>
           </a:p>
           <a:p>
-            <a:pPr/>
             <a:r>
               <a:t>Helps juniors think about requirements and edge cases</a:t>
             </a:r>
           </a:p>
           <a:p>
-            <a:pPr/>
             <a:r>
               <a:t>Can also ask: 'What can go wrong if I run this daily?'</a:t>
             </a:r>
@@ -3484,7 +3500,7 @@
 </file>
 
 <file path=ppt/slides/slide14.xml><?xml version="1.0" encoding="utf-8"?>
-<p:sld xmlns:a="http://schemas.openxmlformats.org/drawingml/2006/main" xmlns:p="http://schemas.openxmlformats.org/presentationml/2006/main" xmlns:r="http://schemas.openxmlformats.org/officeDocument/2006/relationships">
+<p:sld xmlns:a="http://schemas.openxmlformats.org/drawingml/2006/main" xmlns:r="http://schemas.openxmlformats.org/officeDocument/2006/relationships" xmlns:p="http://schemas.openxmlformats.org/presentationml/2006/main">
   <p:cSld>
     <p:spTree>
       <p:nvGrpSpPr>
@@ -3492,7 +3508,14 @@
         <p:cNvGrpSpPr/>
         <p:nvPr/>
       </p:nvGrpSpPr>
-      <p:grpSpPr/>
+      <p:grpSpPr>
+        <a:xfrm>
+          <a:off x="0" y="0"/>
+          <a:ext cx="0" cy="0"/>
+          <a:chOff x="0" y="0"/>
+          <a:chExt cx="0" cy="0"/>
+        </a:xfrm>
+      </p:grpSpPr>
       <p:sp>
         <p:nvSpPr>
           <p:cNvPr id="2" name="Title 1"/>
@@ -3534,19 +3557,16 @@
             </a:r>
           </a:p>
           <a:p>
-            <a:pPr/>
             <a:r>
               <a:t>Example: 'Explain step by step how to build a daily sales summary query, then give the final SQL'</a:t>
             </a:r>
           </a:p>
           <a:p>
-            <a:pPr/>
             <a:r>
               <a:t>Useful when learning a new concept like window functions</a:t>
             </a:r>
           </a:p>
           <a:p>
-            <a:pPr/>
             <a:r>
               <a:t>You see the reasoning, not just final code</a:t>
             </a:r>
@@ -3562,7 +3582,7 @@
 </file>
 
 <file path=ppt/slides/slide15.xml><?xml version="1.0" encoding="utf-8"?>
-<p:sld xmlns:a="http://schemas.openxmlformats.org/drawingml/2006/main" xmlns:p="http://schemas.openxmlformats.org/presentationml/2006/main" xmlns:r="http://schemas.openxmlformats.org/officeDocument/2006/relationships">
+<p:sld xmlns:a="http://schemas.openxmlformats.org/drawingml/2006/main" xmlns:r="http://schemas.openxmlformats.org/officeDocument/2006/relationships" xmlns:p="http://schemas.openxmlformats.org/presentationml/2006/main">
   <p:cSld>
     <p:spTree>
       <p:nvGrpSpPr>
@@ -3570,7 +3590,14 @@
         <p:cNvGrpSpPr/>
         <p:nvPr/>
       </p:nvGrpSpPr>
-      <p:grpSpPr/>
+      <p:grpSpPr>
+        <a:xfrm>
+          <a:off x="0" y="0"/>
+          <a:ext cx="0" cy="0"/>
+          <a:chOff x="0" y="0"/>
+          <a:chExt cx="0" cy="0"/>
+        </a:xfrm>
+      </p:grpSpPr>
       <p:sp>
         <p:nvSpPr>
           <p:cNvPr id="2" name="Title 1"/>
@@ -3612,19 +3639,16 @@
             </a:r>
           </a:p>
           <a:p>
-            <a:pPr/>
             <a:r>
               <a:t>Example: 'You are a senior SQL developer. Simplify this query for readability'</a:t>
             </a:r>
           </a:p>
           <a:p>
-            <a:pPr/>
             <a:r>
               <a:t>Example: 'You are a performance expert. Suggest improvements for large tables'</a:t>
             </a:r>
           </a:p>
           <a:p>
-            <a:pPr/>
             <a:r>
               <a:t>Role hints often produce more focused answers</a:t>
             </a:r>
@@ -3640,7 +3664,7 @@
 </file>
 
 <file path=ppt/slides/slide16.xml><?xml version="1.0" encoding="utf-8"?>
-<p:sld xmlns:a="http://schemas.openxmlformats.org/drawingml/2006/main" xmlns:p="http://schemas.openxmlformats.org/presentationml/2006/main" xmlns:r="http://schemas.openxmlformats.org/officeDocument/2006/relationships">
+<p:sld xmlns:a="http://schemas.openxmlformats.org/drawingml/2006/main" xmlns:r="http://schemas.openxmlformats.org/officeDocument/2006/relationships" xmlns:p="http://schemas.openxmlformats.org/presentationml/2006/main">
   <p:cSld>
     <p:spTree>
       <p:nvGrpSpPr>
@@ -3648,7 +3672,14 @@
         <p:cNvGrpSpPr/>
         <p:nvPr/>
       </p:nvGrpSpPr>
-      <p:grpSpPr/>
+      <p:grpSpPr>
+        <a:xfrm>
+          <a:off x="0" y="0"/>
+          <a:ext cx="0" cy="0"/>
+          <a:chOff x="0" y="0"/>
+          <a:chExt cx="0" cy="0"/>
+        </a:xfrm>
+      </p:grpSpPr>
       <p:sp>
         <p:nvSpPr>
           <p:cNvPr id="2" name="Title 1"/>
@@ -3690,19 +3721,16 @@
             </a:r>
           </a:p>
           <a:p>
-            <a:pPr/>
             <a:r>
               <a:t>Ask: 'Write a query that transforms input to output exactly'</a:t>
             </a:r>
           </a:p>
           <a:p>
-            <a:pPr/>
             <a:r>
               <a:t>Great for tricky business logic like status changes or SCD</a:t>
             </a:r>
           </a:p>
           <a:p>
-            <a:pPr/>
             <a:r>
               <a:t>Makes your intent very clear to Copilot</a:t>
             </a:r>
@@ -3718,7 +3746,7 @@
 </file>
 
 <file path=ppt/slides/slide17.xml><?xml version="1.0" encoding="utf-8"?>
-<p:sld xmlns:a="http://schemas.openxmlformats.org/drawingml/2006/main" xmlns:p="http://schemas.openxmlformats.org/presentationml/2006/main" xmlns:r="http://schemas.openxmlformats.org/officeDocument/2006/relationships">
+<p:sld xmlns:a="http://schemas.openxmlformats.org/drawingml/2006/main" xmlns:r="http://schemas.openxmlformats.org/officeDocument/2006/relationships" xmlns:p="http://schemas.openxmlformats.org/presentationml/2006/main">
   <p:cSld>
     <p:spTree>
       <p:nvGrpSpPr>
@@ -3726,7 +3754,14 @@
         <p:cNvGrpSpPr/>
         <p:nvPr/>
       </p:nvGrpSpPr>
-      <p:grpSpPr/>
+      <p:grpSpPr>
+        <a:xfrm>
+          <a:off x="0" y="0"/>
+          <a:ext cx="0" cy="0"/>
+          <a:chOff x="0" y="0"/>
+          <a:chExt cx="0" cy="0"/>
+        </a:xfrm>
+      </p:grpSpPr>
       <p:sp>
         <p:nvSpPr>
           <p:cNvPr id="2" name="Title 1"/>
@@ -3768,19 +3803,16 @@
             </a:r>
           </a:p>
           <a:p>
-            <a:pPr/>
             <a:r>
               <a:t>Example: 'Create a template for daily incremental load script with comments'</a:t>
             </a:r>
           </a:p>
           <a:p>
-            <a:pPr/>
             <a:r>
               <a:t>Store good prompts and answers in a shared team wiki</a:t>
             </a:r>
           </a:p>
           <a:p>
-            <a:pPr/>
             <a:r>
               <a:t>Reuse and adapt instead of starting from scratch every time</a:t>
             </a:r>
@@ -3796,7 +3828,7 @@
 </file>
 
 <file path=ppt/slides/slide18.xml><?xml version="1.0" encoding="utf-8"?>
-<p:sld xmlns:a="http://schemas.openxmlformats.org/drawingml/2006/main" xmlns:p="http://schemas.openxmlformats.org/presentationml/2006/main" xmlns:r="http://schemas.openxmlformats.org/officeDocument/2006/relationships">
+<p:sld xmlns:a="http://schemas.openxmlformats.org/drawingml/2006/main" xmlns:r="http://schemas.openxmlformats.org/officeDocument/2006/relationships" xmlns:p="http://schemas.openxmlformats.org/presentationml/2006/main">
   <p:cSld>
     <p:spTree>
       <p:nvGrpSpPr>
@@ -3804,7 +3836,14 @@
         <p:cNvGrpSpPr/>
         <p:nvPr/>
       </p:nvGrpSpPr>
-      <p:grpSpPr/>
+      <p:grpSpPr>
+        <a:xfrm>
+          <a:off x="0" y="0"/>
+          <a:ext cx="0" cy="0"/>
+          <a:chOff x="0" y="0"/>
+          <a:chExt cx="0" cy="0"/>
+        </a:xfrm>
+      </p:grpSpPr>
       <p:sp>
         <p:nvSpPr>
           <p:cNvPr id="2" name="Title 1"/>
@@ -3846,19 +3885,16 @@
             </a:r>
           </a:p>
           <a:p>
-            <a:pPr/>
             <a:r>
               <a:t>Example: 'Give me two different ways to write this aggregate query'</a:t>
             </a:r>
           </a:p>
           <a:p>
-            <a:pPr/>
             <a:r>
               <a:t>Follow‑up: 'Which one will perform better on 100M rows and why?'</a:t>
             </a:r>
           </a:p>
           <a:p>
-            <a:pPr/>
             <a:r>
               <a:t>Helps you learn trade‑offs, not just syntax</a:t>
             </a:r>
@@ -3874,7 +3910,7 @@
 </file>
 
 <file path=ppt/slides/slide19.xml><?xml version="1.0" encoding="utf-8"?>
-<p:sld xmlns:a="http://schemas.openxmlformats.org/drawingml/2006/main" xmlns:p="http://schemas.openxmlformats.org/presentationml/2006/main" xmlns:r="http://schemas.openxmlformats.org/officeDocument/2006/relationships">
+<p:sld xmlns:a="http://schemas.openxmlformats.org/drawingml/2006/main" xmlns:r="http://schemas.openxmlformats.org/officeDocument/2006/relationships" xmlns:p="http://schemas.openxmlformats.org/presentationml/2006/main">
   <p:cSld>
     <p:spTree>
       <p:nvGrpSpPr>
@@ -3882,7 +3918,14 @@
         <p:cNvGrpSpPr/>
         <p:nvPr/>
       </p:nvGrpSpPr>
-      <p:grpSpPr/>
+      <p:grpSpPr>
+        <a:xfrm>
+          <a:off x="0" y="0"/>
+          <a:ext cx="0" cy="0"/>
+          <a:chOff x="0" y="0"/>
+          <a:chExt cx="0" cy="0"/>
+        </a:xfrm>
+      </p:grpSpPr>
       <p:sp>
         <p:nvSpPr>
           <p:cNvPr id="2" name="Title 1"/>
@@ -3924,19 +3967,16 @@
             </a:r>
           </a:p>
           <a:p>
-            <a:pPr/>
             <a:r>
               <a:t>Ask: 'Explain this error and show a fixed version'</a:t>
             </a:r>
           </a:p>
           <a:p>
-            <a:pPr/>
             <a:r>
               <a:t>Follow‑up: 'How could I avoid this error in future?'</a:t>
             </a:r>
           </a:p>
           <a:p>
-            <a:pPr/>
             <a:r>
               <a:t>Teaches both fix and prevention in one go</a:t>
             </a:r>
@@ -3952,7 +3992,7 @@
 </file>
 
 <file path=ppt/slides/slide2.xml><?xml version="1.0" encoding="utf-8"?>
-<p:sld xmlns:a="http://schemas.openxmlformats.org/drawingml/2006/main" xmlns:p="http://schemas.openxmlformats.org/presentationml/2006/main" xmlns:r="http://schemas.openxmlformats.org/officeDocument/2006/relationships">
+<p:sld xmlns:a="http://schemas.openxmlformats.org/drawingml/2006/main" xmlns:r="http://schemas.openxmlformats.org/officeDocument/2006/relationships" xmlns:p="http://schemas.openxmlformats.org/presentationml/2006/main">
   <p:cSld>
     <p:spTree>
       <p:nvGrpSpPr>
@@ -3960,7 +4000,14 @@
         <p:cNvGrpSpPr/>
         <p:nvPr/>
       </p:nvGrpSpPr>
-      <p:grpSpPr/>
+      <p:grpSpPr>
+        <a:xfrm>
+          <a:off x="0" y="0"/>
+          <a:ext cx="0" cy="0"/>
+          <a:chOff x="0" y="0"/>
+          <a:chExt cx="0" cy="0"/>
+        </a:xfrm>
+      </p:grpSpPr>
       <p:sp>
         <p:nvSpPr>
           <p:cNvPr id="2" name="Title 1"/>
@@ -4002,19 +4049,16 @@
             </a:r>
           </a:p>
           <a:p>
-            <a:pPr/>
             <a:r>
               <a:t>Opens as a side chat window inside your editor</a:t>
             </a:r>
           </a:p>
           <a:p>
-            <a:pPr/>
             <a:r>
               <a:t>Understands the files open in your workspace</a:t>
             </a:r>
           </a:p>
           <a:p>
-            <a:pPr/>
             <a:r>
               <a:t>Works with natural language questions</a:t>
             </a:r>
@@ -4030,7 +4074,7 @@
 </file>
 
 <file path=ppt/slides/slide20.xml><?xml version="1.0" encoding="utf-8"?>
-<p:sld xmlns:a="http://schemas.openxmlformats.org/drawingml/2006/main" xmlns:p="http://schemas.openxmlformats.org/presentationml/2006/main" xmlns:r="http://schemas.openxmlformats.org/officeDocument/2006/relationships">
+<p:sld xmlns:a="http://schemas.openxmlformats.org/drawingml/2006/main" xmlns:r="http://schemas.openxmlformats.org/officeDocument/2006/relationships" xmlns:p="http://schemas.openxmlformats.org/presentationml/2006/main">
   <p:cSld>
     <p:spTree>
       <p:nvGrpSpPr>
@@ -4038,7 +4082,14 @@
         <p:cNvGrpSpPr/>
         <p:nvPr/>
       </p:nvGrpSpPr>
-      <p:grpSpPr/>
+      <p:grpSpPr>
+        <a:xfrm>
+          <a:off x="0" y="0"/>
+          <a:ext cx="0" cy="0"/>
+          <a:chOff x="0" y="0"/>
+          <a:chExt cx="0" cy="0"/>
+        </a:xfrm>
+      </p:grpSpPr>
       <p:sp>
         <p:nvSpPr>
           <p:cNvPr id="2" name="Title 1"/>
@@ -4080,19 +4131,16 @@
             </a:r>
           </a:p>
           <a:p>
-            <a:pPr/>
             <a:r>
               <a:t>Example: 'Give me a checklist to review before running this ETL script in production'</a:t>
             </a:r>
           </a:p>
           <a:p>
-            <a:pPr/>
             <a:r>
               <a:t>Example: 'List performance checks I should do for this query'</a:t>
             </a:r>
           </a:p>
           <a:p>
-            <a:pPr/>
             <a:r>
               <a:t>Use the checklist to review your own work</a:t>
             </a:r>
@@ -4108,7 +4156,7 @@
 </file>
 
 <file path=ppt/slides/slide21.xml><?xml version="1.0" encoding="utf-8"?>
-<p:sld xmlns:a="http://schemas.openxmlformats.org/drawingml/2006/main" xmlns:p="http://schemas.openxmlformats.org/presentationml/2006/main" xmlns:r="http://schemas.openxmlformats.org/officeDocument/2006/relationships">
+<p:sld xmlns:a="http://schemas.openxmlformats.org/drawingml/2006/main" xmlns:r="http://schemas.openxmlformats.org/officeDocument/2006/relationships" xmlns:p="http://schemas.openxmlformats.org/presentationml/2006/main">
   <p:cSld>
     <p:spTree>
       <p:nvGrpSpPr>
@@ -4116,7 +4164,14 @@
         <p:cNvGrpSpPr/>
         <p:nvPr/>
       </p:nvGrpSpPr>
-      <p:grpSpPr/>
+      <p:grpSpPr>
+        <a:xfrm>
+          <a:off x="0" y="0"/>
+          <a:ext cx="0" cy="0"/>
+          <a:chOff x="0" y="0"/>
+          <a:chExt cx="0" cy="0"/>
+        </a:xfrm>
+      </p:grpSpPr>
       <p:sp>
         <p:nvSpPr>
           <p:cNvPr id="2" name="Title 1"/>
@@ -4158,19 +4213,16 @@
             </a:r>
           </a:p>
           <a:p>
-            <a:pPr/>
             <a:r>
               <a:t>Do: test on small data or non‑prod first</a:t>
             </a:r>
           </a:p>
           <a:p>
-            <a:pPr/>
             <a:r>
               <a:t>Don't: paste passwords or secrets into chat</a:t>
             </a:r>
           </a:p>
           <a:p>
-            <a:pPr/>
             <a:r>
               <a:t>Don't: trust performance or security blindly – review with a senior</a:t>
             </a:r>
@@ -4186,7 +4238,7 @@
 </file>
 
 <file path=ppt/slides/slide22.xml><?xml version="1.0" encoding="utf-8"?>
-<p:sld xmlns:a="http://schemas.openxmlformats.org/drawingml/2006/main" xmlns:p="http://schemas.openxmlformats.org/presentationml/2006/main" xmlns:r="http://schemas.openxmlformats.org/officeDocument/2006/relationships">
+<p:sld xmlns:a="http://schemas.openxmlformats.org/drawingml/2006/main" xmlns:r="http://schemas.openxmlformats.org/officeDocument/2006/relationships" xmlns:p="http://schemas.openxmlformats.org/presentationml/2006/main">
   <p:cSld>
     <p:spTree>
       <p:nvGrpSpPr>
@@ -4194,7 +4246,14 @@
         <p:cNvGrpSpPr/>
         <p:nvPr/>
       </p:nvGrpSpPr>
-      <p:grpSpPr/>
+      <p:grpSpPr>
+        <a:xfrm>
+          <a:off x="0" y="0"/>
+          <a:ext cx="0" cy="0"/>
+          <a:chOff x="0" y="0"/>
+          <a:chExt cx="0" cy="0"/>
+        </a:xfrm>
+      </p:grpSpPr>
       <p:sp>
         <p:nvSpPr>
           <p:cNvPr id="2" name="Title 1"/>
@@ -4236,19 +4295,16 @@
             </a:r>
           </a:p>
           <a:p>
-            <a:pPr/>
             <a:r>
               <a:t>Try at least three prompt patterns on real ETL logic</a:t>
             </a:r>
           </a:p>
           <a:p>
-            <a:pPr/>
             <a:r>
               <a:t>Save your best prompts in a shared team document</a:t>
             </a:r>
           </a:p>
           <a:p>
-            <a:pPr/>
             <a:r>
               <a:t>Ask seniors which prompts worked well for them</a:t>
             </a:r>
@@ -4264,7 +4320,7 @@
 </file>
 
 <file path=ppt/slides/slide3.xml><?xml version="1.0" encoding="utf-8"?>
-<p:sld xmlns:a="http://schemas.openxmlformats.org/drawingml/2006/main" xmlns:p="http://schemas.openxmlformats.org/presentationml/2006/main" xmlns:r="http://schemas.openxmlformats.org/officeDocument/2006/relationships">
+<p:sld xmlns:a="http://schemas.openxmlformats.org/drawingml/2006/main" xmlns:r="http://schemas.openxmlformats.org/officeDocument/2006/relationships" xmlns:p="http://schemas.openxmlformats.org/presentationml/2006/main">
   <p:cSld>
     <p:spTree>
       <p:nvGrpSpPr>
@@ -4272,7 +4328,14 @@
         <p:cNvGrpSpPr/>
         <p:nvPr/>
       </p:nvGrpSpPr>
-      <p:grpSpPr/>
+      <p:grpSpPr>
+        <a:xfrm>
+          <a:off x="0" y="0"/>
+          <a:ext cx="0" cy="0"/>
+          <a:chOff x="0" y="0"/>
+          <a:chExt cx="0" cy="0"/>
+        </a:xfrm>
+      </p:grpSpPr>
       <p:sp>
         <p:nvSpPr>
           <p:cNvPr id="2" name="Title 1"/>
@@ -4314,13 +4377,11 @@
             </a:r>
           </a:p>
           <a:p>
-            <a:pPr/>
             <a:r>
               <a:t>Edit mode – let Copilot rewrite or improve selected code</a:t>
             </a:r>
           </a:p>
           <a:p>
-            <a:pPr/>
             <a:r>
               <a:t>Agent mode – let Copilot work across multiple files/tasks</a:t>
             </a:r>
@@ -4336,7 +4397,7 @@
 </file>
 
 <file path=ppt/slides/slide4.xml><?xml version="1.0" encoding="utf-8"?>
-<p:sld xmlns:a="http://schemas.openxmlformats.org/drawingml/2006/main" xmlns:p="http://schemas.openxmlformats.org/presentationml/2006/main" xmlns:r="http://schemas.openxmlformats.org/officeDocument/2006/relationships">
+<p:sld xmlns:a="http://schemas.openxmlformats.org/drawingml/2006/main" xmlns:r="http://schemas.openxmlformats.org/officeDocument/2006/relationships" xmlns:p="http://schemas.openxmlformats.org/presentationml/2006/main">
   <p:cSld>
     <p:spTree>
       <p:nvGrpSpPr>
@@ -4344,7 +4405,14 @@
         <p:cNvGrpSpPr/>
         <p:nvPr/>
       </p:nvGrpSpPr>
-      <p:grpSpPr/>
+      <p:grpSpPr>
+        <a:xfrm>
+          <a:off x="0" y="0"/>
+          <a:ext cx="0" cy="0"/>
+          <a:chOff x="0" y="0"/>
+          <a:chExt cx="0" cy="0"/>
+        </a:xfrm>
+      </p:grpSpPr>
       <p:sp>
         <p:nvSpPr>
           <p:cNvPr id="2" name="Title 1"/>
@@ -4386,19 +4454,16 @@
             </a:r>
           </a:p>
           <a:p>
-            <a:pPr/>
             <a:r>
               <a:t>You want Copilot to write a new query from your description</a:t>
             </a:r>
           </a:p>
           <a:p>
-            <a:pPr/>
             <a:r>
               <a:t>You want help debugging an error message</a:t>
             </a:r>
           </a:p>
           <a:p>
-            <a:pPr/>
             <a:r>
               <a:t>You want ideas: better indexes, filters, or joins</a:t>
             </a:r>
@@ -4414,7 +4479,7 @@
 </file>
 
 <file path=ppt/slides/slide5.xml><?xml version="1.0" encoding="utf-8"?>
-<p:sld xmlns:a="http://schemas.openxmlformats.org/drawingml/2006/main" xmlns:p="http://schemas.openxmlformats.org/presentationml/2006/main" xmlns:r="http://schemas.openxmlformats.org/officeDocument/2006/relationships">
+<p:sld xmlns:a="http://schemas.openxmlformats.org/drawingml/2006/main" xmlns:r="http://schemas.openxmlformats.org/officeDocument/2006/relationships" xmlns:p="http://schemas.openxmlformats.org/presentationml/2006/main">
   <p:cSld>
     <p:spTree>
       <p:nvGrpSpPr>
@@ -4422,7 +4487,14 @@
         <p:cNvGrpSpPr/>
         <p:nvPr/>
       </p:nvGrpSpPr>
-      <p:grpSpPr/>
+      <p:grpSpPr>
+        <a:xfrm>
+          <a:off x="0" y="0"/>
+          <a:ext cx="0" cy="0"/>
+          <a:chOff x="0" y="0"/>
+          <a:chExt cx="0" cy="0"/>
+        </a:xfrm>
+      </p:grpSpPr>
       <p:sp>
         <p:nvSpPr>
           <p:cNvPr id="2" name="Title 1"/>
@@ -4464,19 +4536,16 @@
             </a:r>
           </a:p>
           <a:p>
-            <a:pPr/>
             <a:r>
               <a:t>Write a query on sales(order_id, amount, order_date) to get daily totals</a:t>
             </a:r>
           </a:p>
           <a:p>
-            <a:pPr/>
             <a:r>
               <a:t>What is the difference between INNER JOIN and LEFT JOIN?</a:t>
             </a:r>
           </a:p>
           <a:p>
-            <a:pPr/>
             <a:r>
               <a:t>Suggest indexes to speed up this query on a large table</a:t>
             </a:r>
@@ -4492,7 +4561,7 @@
 </file>
 
 <file path=ppt/slides/slide6.xml><?xml version="1.0" encoding="utf-8"?>
-<p:sld xmlns:a="http://schemas.openxmlformats.org/drawingml/2006/main" xmlns:p="http://schemas.openxmlformats.org/presentationml/2006/main" xmlns:r="http://schemas.openxmlformats.org/officeDocument/2006/relationships">
+<p:sld xmlns:a="http://schemas.openxmlformats.org/drawingml/2006/main" xmlns:r="http://schemas.openxmlformats.org/officeDocument/2006/relationships" xmlns:p="http://schemas.openxmlformats.org/presentationml/2006/main">
   <p:cSld>
     <p:spTree>
       <p:nvGrpSpPr>
@@ -4500,7 +4569,14 @@
         <p:cNvGrpSpPr/>
         <p:nvPr/>
       </p:nvGrpSpPr>
-      <p:grpSpPr/>
+      <p:grpSpPr>
+        <a:xfrm>
+          <a:off x="0" y="0"/>
+          <a:ext cx="0" cy="0"/>
+          <a:chOff x="0" y="0"/>
+          <a:chExt cx="0" cy="0"/>
+        </a:xfrm>
+      </p:grpSpPr>
       <p:sp>
         <p:nvSpPr>
           <p:cNvPr id="2" name="Title 1"/>
@@ -4542,19 +4618,16 @@
             </a:r>
           </a:p>
           <a:p>
-            <a:pPr/>
             <a:r>
               <a:t>You want better formatting and naming without changing logic</a:t>
             </a:r>
           </a:p>
           <a:p>
-            <a:pPr/>
             <a:r>
               <a:t>You want Copilot to add comments or logging to existing scripts</a:t>
             </a:r>
           </a:p>
           <a:p>
-            <a:pPr/>
             <a:r>
               <a:t>You want the same logic adapted to a slightly different table</a:t>
             </a:r>
@@ -4570,7 +4643,7 @@
 </file>
 
 <file path=ppt/slides/slide7.xml><?xml version="1.0" encoding="utf-8"?>
-<p:sld xmlns:a="http://schemas.openxmlformats.org/drawingml/2006/main" xmlns:p="http://schemas.openxmlformats.org/presentationml/2006/main" xmlns:r="http://schemas.openxmlformats.org/officeDocument/2006/relationships">
+<p:sld xmlns:a="http://schemas.openxmlformats.org/drawingml/2006/main" xmlns:r="http://schemas.openxmlformats.org/officeDocument/2006/relationships" xmlns:p="http://schemas.openxmlformats.org/presentationml/2006/main">
   <p:cSld>
     <p:spTree>
       <p:nvGrpSpPr>
@@ -4578,7 +4651,14 @@
         <p:cNvGrpSpPr/>
         <p:nvPr/>
       </p:nvGrpSpPr>
-      <p:grpSpPr/>
+      <p:grpSpPr>
+        <a:xfrm>
+          <a:off x="0" y="0"/>
+          <a:ext cx="0" cy="0"/>
+          <a:chOff x="0" y="0"/>
+          <a:chExt cx="0" cy="0"/>
+        </a:xfrm>
+      </p:grpSpPr>
       <p:sp>
         <p:nvSpPr>
           <p:cNvPr id="2" name="Title 1"/>
@@ -4620,19 +4700,16 @@
             </a:r>
           </a:p>
           <a:p>
-            <a:pPr/>
             <a:r>
               <a:t>Select a stored procedure → ask: 'Add clear comments for each step'</a:t>
             </a:r>
           </a:p>
           <a:p>
-            <a:pPr/>
             <a:r>
               <a:t>Select a script → ask: 'Refactor this to avoid SELECT * and list columns'</a:t>
             </a:r>
           </a:p>
           <a:p>
-            <a:pPr/>
             <a:r>
               <a:t>Select a query → ask: 'Add error handling for missing table or column'</a:t>
             </a:r>
@@ -4648,7 +4725,7 @@
 </file>
 
 <file path=ppt/slides/slide8.xml><?xml version="1.0" encoding="utf-8"?>
-<p:sld xmlns:a="http://schemas.openxmlformats.org/drawingml/2006/main" xmlns:p="http://schemas.openxmlformats.org/presentationml/2006/main" xmlns:r="http://schemas.openxmlformats.org/officeDocument/2006/relationships">
+<p:sld xmlns:a="http://schemas.openxmlformats.org/drawingml/2006/main" xmlns:r="http://schemas.openxmlformats.org/officeDocument/2006/relationships" xmlns:p="http://schemas.openxmlformats.org/presentationml/2006/main">
   <p:cSld>
     <p:spTree>
       <p:nvGrpSpPr>
@@ -4656,7 +4733,14 @@
         <p:cNvGrpSpPr/>
         <p:nvPr/>
       </p:nvGrpSpPr>
-      <p:grpSpPr/>
+      <p:grpSpPr>
+        <a:xfrm>
+          <a:off x="0" y="0"/>
+          <a:ext cx="0" cy="0"/>
+          <a:chOff x="0" y="0"/>
+          <a:chExt cx="0" cy="0"/>
+        </a:xfrm>
+      </p:grpSpPr>
       <p:sp>
         <p:nvSpPr>
           <p:cNvPr id="2" name="Title 1"/>
@@ -4698,19 +4782,16 @@
             </a:r>
           </a:p>
           <a:p>
-            <a:pPr/>
             <a:r>
               <a:t>You want to find and update similar patterns in many scripts</a:t>
             </a:r>
           </a:p>
           <a:p>
-            <a:pPr/>
             <a:r>
               <a:t>You want to scaffold a new ETL script using existing patterns</a:t>
             </a:r>
           </a:p>
           <a:p>
-            <a:pPr/>
             <a:r>
               <a:t>You are comfortable reviewing and accepting code changes</a:t>
             </a:r>
@@ -4726,7 +4807,7 @@
 </file>
 
 <file path=ppt/slides/slide9.xml><?xml version="1.0" encoding="utf-8"?>
-<p:sld xmlns:a="http://schemas.openxmlformats.org/drawingml/2006/main" xmlns:p="http://schemas.openxmlformats.org/presentationml/2006/main" xmlns:r="http://schemas.openxmlformats.org/officeDocument/2006/relationships">
+<p:sld xmlns:a="http://schemas.openxmlformats.org/drawingml/2006/main" xmlns:r="http://schemas.openxmlformats.org/officeDocument/2006/relationships" xmlns:p="http://schemas.openxmlformats.org/presentationml/2006/main">
   <p:cSld>
     <p:spTree>
       <p:nvGrpSpPr>
@@ -4734,7 +4815,14 @@
         <p:cNvGrpSpPr/>
         <p:nvPr/>
       </p:nvGrpSpPr>
-      <p:grpSpPr/>
+      <p:grpSpPr>
+        <a:xfrm>
+          <a:off x="0" y="0"/>
+          <a:ext cx="0" cy="0"/>
+          <a:chOff x="0" y="0"/>
+          <a:chExt cx="0" cy="0"/>
+        </a:xfrm>
+      </p:grpSpPr>
       <p:sp>
         <p:nvSpPr>
           <p:cNvPr id="2" name="Title 1"/>
@@ -4776,19 +4864,16 @@
             </a:r>
           </a:p>
           <a:p>
-            <a:pPr/>
             <a:r>
               <a:t>Create a new script similar to script_A.sql but for table_B</a:t>
             </a:r>
           </a:p>
           <a:p>
-            <a:pPr/>
             <a:r>
               <a:t>Find all procedures that update customer table and summarize the logic</a:t>
             </a:r>
           </a:p>
           <a:p>
-            <a:pPr/>
             <a:r>
               <a:t>Generate a new daily load script using the style of these two files</a:t>
             </a:r>
